--- a/assets/powerpoints/module-n3-epicerie/A3-comment-une-epicerie-est-rangee.pptx
+++ b/assets/powerpoints/module-n3-epicerie/A3-comment-une-epicerie-est-rangee.pptx
@@ -9773,7 +9773,25 @@
                 </a:solidFill>
                 <a:latin typeface="Verdana"/>
               </a:rPr>
-              <a:t>Le format le plus vendu est placé à hauteur des yeux ; les grands sacs et les grosses bouteilles sont sur la tablette du bas, parce qu'ils sont lourds. Si vous ne voyez pas ce que vous cherchez, &lt;b&gt;baissez les yeux&lt;/b&gt; avant de conclure qu'il n'y en a plus.</a:t>
+              <a:t>Le format le plus vendu est placé à hauteur des yeux ; les grands sacs et les grosses bouteilles sont sur la tablette du bas, parce qu'ils sont lourds. Si vous ne voyez pas ce que vous cherchez, </a:t>
+            </a:r>
+            <a:r>
+              <a:rPr sz="2000" b="1" i="0">
+                <a:solidFill>
+                  <a:srgbClr val="4B4F52"/>
+                </a:solidFill>
+                <a:latin typeface="Verdana"/>
+              </a:rPr>
+              <a:t>baissez les yeux</a:t>
+            </a:r>
+            <a:r>
+              <a:rPr sz="2000" b="0" i="0">
+                <a:solidFill>
+                  <a:srgbClr val="4B4F52"/>
+                </a:solidFill>
+                <a:latin typeface="Verdana"/>
+              </a:rPr>
+              <a:t> avant de conclure qu'il n'y en a plus.</a:t>
             </a:r>
           </a:p>
         </p:txBody>
